--- a/Week01_IntroAndBinaryNumbers/Ch00_Basics_V4.pptx
+++ b/Week01_IntroAndBinaryNumbers/Ch00_Basics_V4.pptx
@@ -7,10 +7,10 @@
     <p:sldMasterId id="2147483687" r:id="rId3"/>
   </p:sldMasterIdLst>
   <p:notesMasterIdLst>
-    <p:notesMasterId r:id="rId22"/>
+    <p:notesMasterId r:id="rId21"/>
   </p:notesMasterIdLst>
   <p:handoutMasterIdLst>
-    <p:handoutMasterId r:id="rId23"/>
+    <p:handoutMasterId r:id="rId22"/>
   </p:handoutMasterIdLst>
   <p:sldIdLst>
     <p:sldId id="333" r:id="rId4"/>
@@ -27,10 +27,9 @@
     <p:sldId id="483" r:id="rId15"/>
     <p:sldId id="472" r:id="rId16"/>
     <p:sldId id="445" r:id="rId17"/>
-    <p:sldId id="484" r:id="rId18"/>
-    <p:sldId id="452" r:id="rId19"/>
-    <p:sldId id="442" r:id="rId20"/>
-    <p:sldId id="336" r:id="rId21"/>
+    <p:sldId id="452" r:id="rId18"/>
+    <p:sldId id="442" r:id="rId19"/>
+    <p:sldId id="336" r:id="rId20"/>
   </p:sldIdLst>
   <p:sldSz cx="12192000" cy="6858000"/>
   <p:notesSz cx="7010400" cy="9296400"/>
@@ -219,7 +218,7 @@
           <a:p>
             <a:fld id="{8E938536-29D3-49BD-A567-41CAF057586A}" type="datetimeFigureOut">
               <a:rPr lang="en-US" smtClean="0"/>
-              <a:t>8/20/2026</a:t>
+              <a:t>9/20/2026</a:t>
             </a:fld>
             <a:endParaRPr lang="en-US"/>
           </a:p>
@@ -384,7 +383,7 @@
           <a:p>
             <a:fld id="{71559A16-B3AD-4CE2-9A5E-FAAD3C2C27CA}" type="datetimeFigureOut">
               <a:rPr lang="en-US" smtClean="0"/>
-              <a:t>8/20/2026</a:t>
+              <a:t>9/20/2026</a:t>
             </a:fld>
             <a:endParaRPr lang="en-US"/>
           </a:p>
@@ -10162,7 +10161,7 @@
         </p:spPr>
         <p:txBody>
           <a:bodyPr>
-            <a:normAutofit/>
+            <a:normAutofit fontScale="92500" lnSpcReduction="10000"/>
           </a:bodyPr>
           <a:lstStyle/>
           <a:p>
@@ -10307,6 +10306,53 @@
               </a:rPr>
               <a:t>The worst lab will be dropped</a:t>
             </a:r>
+          </a:p>
+          <a:p>
+            <a:pPr marL="342900" indent="-342900">
+              <a:buFont typeface="Arial" panose="020B0604020202020204" pitchFamily="34" charset="0"/>
+              <a:buChar char="•"/>
+            </a:pPr>
+            <a:endParaRPr lang="it-IT" b="0" dirty="0">
+              <a:solidFill>
+                <a:schemeClr val="tx1"/>
+              </a:solidFill>
+            </a:endParaRPr>
+          </a:p>
+          <a:p>
+            <a:pPr marL="342900" indent="-342900">
+              <a:buFont typeface="Arial" panose="020B0604020202020204" pitchFamily="34" charset="0"/>
+              <a:buChar char="•"/>
+            </a:pPr>
+            <a:r>
+              <a:rPr lang="it-IT" b="0" dirty="0">
+                <a:solidFill>
+                  <a:schemeClr val="tx1"/>
+                </a:solidFill>
+              </a:rPr>
+              <a:t>Yan Cui </a:t>
+            </a:r>
+            <a:r>
+              <a:rPr lang="it-IT" b="0" dirty="0">
+                <a:solidFill>
+                  <a:schemeClr val="tx1"/>
+                </a:solidFill>
+                <a:hlinkClick r:id="rId2"/>
+              </a:rPr>
+              <a:t>ycui4@scu.edu</a:t>
+            </a:r>
+            <a:r>
+              <a:rPr lang="it-IT" b="0" dirty="0">
+                <a:solidFill>
+                  <a:schemeClr val="tx1"/>
+                </a:solidFill>
+              </a:rPr>
+              <a:t> is in charge</a:t>
+            </a:r>
+            <a:endParaRPr lang="en-US" b="0" dirty="0">
+              <a:solidFill>
+                <a:schemeClr val="tx1"/>
+              </a:solidFill>
+            </a:endParaRPr>
           </a:p>
         </p:txBody>
       </p:sp>
@@ -10328,13 +10374,7 @@
   <p:cSld>
     <p:spTree>
       <p:nvGrpSpPr>
-        <p:cNvPr id="1" name="">
-          <a:extLst>
-            <a:ext uri="{FF2B5EF4-FFF2-40B4-BE49-F238E27FC236}">
-              <a16:creationId xmlns:a16="http://schemas.microsoft.com/office/drawing/2014/main" id="{C13DA9BA-B363-6895-CE4D-38F0EAA0CC11}"/>
-            </a:ext>
-          </a:extLst>
-        </p:cNvPr>
+        <p:cNvPr id="1" name=""/>
         <p:cNvGrpSpPr/>
         <p:nvPr/>
       </p:nvGrpSpPr>
@@ -10351,7 +10391,7 @@
           <p:cNvPr id="2" name="Subtitle 1">
             <a:extLst>
               <a:ext uri="{FF2B5EF4-FFF2-40B4-BE49-F238E27FC236}">
-                <a16:creationId xmlns:a16="http://schemas.microsoft.com/office/drawing/2014/main" id="{DF682E7B-4831-54D1-7014-76791824BC59}"/>
+                <a16:creationId xmlns:a16="http://schemas.microsoft.com/office/drawing/2014/main" id="{DAF3DE3F-7502-904F-9BAB-B1F5DEA23BEF}"/>
               </a:ext>
             </a:extLst>
           </p:cNvPr>
@@ -10364,8 +10404,8 @@
         </p:nvSpPr>
         <p:spPr>
           <a:xfrm>
-            <a:off x="933084" y="734927"/>
-            <a:ext cx="11369752" cy="5930568"/>
+            <a:off x="1326116" y="1304422"/>
+            <a:ext cx="9144000" cy="5308936"/>
           </a:xfrm>
         </p:spPr>
         <p:txBody>
@@ -10375,222 +10415,53 @@
           <a:lstStyle/>
           <a:p>
             <a:r>
-              <a:rPr lang="en-US" sz="2000" dirty="0">
+              <a:rPr lang="en-US" dirty="0">
                 <a:solidFill>
                   <a:schemeClr val="tx1"/>
                 </a:solidFill>
               </a:rPr>
-              <a:t>Labs:</a:t>
-            </a:r>
-          </a:p>
-          <a:p>
-            <a:pPr marL="342900" indent="-342900">
-              <a:buFont typeface="Arial" panose="020B0604020202020204" pitchFamily="34" charset="0"/>
-              <a:buChar char="•"/>
-            </a:pPr>
-            <a:endParaRPr lang="en-US" sz="2000" b="0" dirty="0">
-              <a:solidFill>
-                <a:schemeClr val="tx1"/>
-              </a:solidFill>
-            </a:endParaRPr>
-          </a:p>
-          <a:p>
-            <a:r>
-              <a:rPr lang="en-US" sz="2000" dirty="0">
-                <a:solidFill>
-                  <a:schemeClr val="tx1"/>
-                </a:solidFill>
-              </a:rPr>
-              <a:t>TA’s: </a:t>
-            </a:r>
-          </a:p>
-          <a:p>
-            <a:pPr marL="342900" indent="-342900">
-              <a:buFont typeface="Arial" panose="020B0604020202020204" pitchFamily="34" charset="0"/>
-              <a:buChar char="•"/>
-            </a:pPr>
-            <a:endParaRPr lang="en-US" sz="1200" b="0" dirty="0">
-              <a:solidFill>
-                <a:schemeClr val="tx1"/>
-              </a:solidFill>
-            </a:endParaRPr>
-          </a:p>
-          <a:p>
-            <a:pPr marL="342900" indent="-342900">
-              <a:buFont typeface="Arial" panose="020B0604020202020204" pitchFamily="34" charset="0"/>
-              <a:buChar char="•"/>
-            </a:pPr>
-            <a:r>
-              <a:rPr lang="en-US" sz="1200" b="0" dirty="0">
-                <a:solidFill>
-                  <a:schemeClr val="tx1"/>
-                </a:solidFill>
-              </a:rPr>
-              <a:t>Tuesday       5:30 PM - 8:15 PM Rm 112 Heafey Hall - Prof. Schimpf &lt;mschimpf@scu.edu&gt; TA: Andrei </a:t>
-            </a:r>
-            <a:r>
-              <a:rPr lang="en-US" sz="1200" b="0" dirty="0" err="1">
-                <a:solidFill>
-                  <a:schemeClr val="tx1"/>
-                </a:solidFill>
-              </a:rPr>
-              <a:t>Negulescu</a:t>
-            </a:r>
-            <a:r>
-              <a:rPr lang="en-US" sz="1200" b="0" dirty="0">
-                <a:solidFill>
-                  <a:schemeClr val="tx1"/>
-                </a:solidFill>
-              </a:rPr>
-              <a:t> &lt;anegulescu@scu.edu&gt;</a:t>
-            </a:r>
-          </a:p>
-          <a:p>
-            <a:pPr marL="342900" indent="-342900">
-              <a:buFont typeface="Arial" panose="020B0604020202020204" pitchFamily="34" charset="0"/>
-              <a:buChar char="•"/>
-            </a:pPr>
-            <a:r>
-              <a:rPr lang="en-US" sz="1200" b="0" dirty="0">
-                <a:solidFill>
-                  <a:schemeClr val="tx1"/>
-                </a:solidFill>
-              </a:rPr>
-              <a:t>Wednesday 2:15 PM - 5:00 PM Rm 112 Heafey Hall - Prof. Schimpf &lt;mschimpf@scu.edu&gt; TA: Ridham </a:t>
-            </a:r>
-            <a:r>
-              <a:rPr lang="en-US" sz="1200" b="0" dirty="0" err="1">
-                <a:solidFill>
-                  <a:schemeClr val="tx1"/>
-                </a:solidFill>
-              </a:rPr>
-              <a:t>Kachhadiya</a:t>
-            </a:r>
-            <a:r>
-              <a:rPr lang="en-US" sz="1200" b="0" dirty="0">
-                <a:solidFill>
-                  <a:schemeClr val="tx1"/>
-                </a:solidFill>
-              </a:rPr>
-              <a:t> &lt;rkachhadiya@scu.edu&gt;</a:t>
-            </a:r>
-          </a:p>
-          <a:p>
-            <a:pPr marL="342900" indent="-342900">
-              <a:buFont typeface="Arial" panose="020B0604020202020204" pitchFamily="34" charset="0"/>
-              <a:buChar char="•"/>
-            </a:pPr>
-            <a:r>
-              <a:rPr lang="en-US" sz="1200" b="0" dirty="0">
-                <a:solidFill>
-                  <a:schemeClr val="tx1"/>
-                </a:solidFill>
-              </a:rPr>
-              <a:t>Wednesday 5:30 PM - 8:15 PM Rm 112 Heafey Hall - Prof. Cui &lt;ycui4@scu.edu&gt;                TA: Ridham </a:t>
-            </a:r>
-            <a:r>
-              <a:rPr lang="en-US" sz="1200" b="0" dirty="0" err="1">
-                <a:solidFill>
-                  <a:schemeClr val="tx1"/>
-                </a:solidFill>
-              </a:rPr>
-              <a:t>Kachhadiya</a:t>
-            </a:r>
-            <a:r>
-              <a:rPr lang="en-US" sz="1200" b="0" dirty="0">
-                <a:solidFill>
-                  <a:schemeClr val="tx1"/>
-                </a:solidFill>
-              </a:rPr>
-              <a:t> &lt;rkachhadiya@scu.edu&gt;</a:t>
-            </a:r>
-          </a:p>
-          <a:p>
-            <a:pPr marL="342900" indent="-342900">
-              <a:buFont typeface="Arial" panose="020B0604020202020204" pitchFamily="34" charset="0"/>
-              <a:buChar char="•"/>
-            </a:pPr>
-            <a:r>
-              <a:rPr lang="en-US" sz="1200" b="0" dirty="0">
-                <a:solidFill>
-                  <a:schemeClr val="tx1"/>
-                </a:solidFill>
-              </a:rPr>
-              <a:t>Thursday     2:15 PM - 5:00 PM Rm 112 Heafey Hall - Prof. Cui &lt;ycui4@scu.edu&gt;                TA: Dhanishtha Patil &lt;dpatil@scu.edu&gt;</a:t>
-            </a:r>
-          </a:p>
-          <a:p>
-            <a:pPr marL="342900" indent="-342900">
-              <a:buFont typeface="Arial" panose="020B0604020202020204" pitchFamily="34" charset="0"/>
-              <a:buChar char="•"/>
-            </a:pPr>
-            <a:r>
-              <a:rPr lang="en-US" sz="1200" b="0" dirty="0">
-                <a:solidFill>
-                  <a:schemeClr val="tx1"/>
-                </a:solidFill>
-              </a:rPr>
-              <a:t>Thursday     5:30 PM - 8:15 PM Rm 112 Heafey Hall - Prof. Cui &lt;ycui4@scu.edu&gt;                TA: Dhanishtha Patil &lt;dpatil@scu.edu&gt;</a:t>
-            </a:r>
-          </a:p>
-          <a:p>
-            <a:pPr marL="342900" indent="-342900">
-              <a:buFont typeface="Arial" panose="020B0604020202020204" pitchFamily="34" charset="0"/>
-              <a:buChar char="•"/>
-            </a:pPr>
-            <a:r>
-              <a:rPr lang="en-US" sz="1200" b="0" dirty="0">
-                <a:solidFill>
-                  <a:schemeClr val="tx1"/>
-                </a:solidFill>
-              </a:rPr>
-              <a:t>Friday          2:15 PM - 5:00 PM Rm 112 Heafey Hall - Prof. Cui &lt;ycui4@scu.edu&gt;                TA: Andrei </a:t>
-            </a:r>
-            <a:r>
-              <a:rPr lang="en-US" sz="1200" b="0" dirty="0" err="1">
-                <a:solidFill>
-                  <a:schemeClr val="tx1"/>
-                </a:solidFill>
-              </a:rPr>
-              <a:t>Negulescu</a:t>
-            </a:r>
-            <a:r>
-              <a:rPr lang="en-US" sz="1200" b="0" dirty="0">
-                <a:solidFill>
-                  <a:schemeClr val="tx1"/>
-                </a:solidFill>
-              </a:rPr>
-              <a:t> &lt;anegulescu@scu.edu&gt;</a:t>
-            </a:r>
-            <a:endParaRPr lang="en-US" sz="1400" b="0" dirty="0">
-              <a:solidFill>
-                <a:schemeClr val="tx1"/>
-              </a:solidFill>
-            </a:endParaRPr>
-          </a:p>
-          <a:p>
-            <a:endParaRPr lang="en-US" b="0" dirty="0">
-              <a:solidFill>
-                <a:schemeClr val="tx1"/>
-              </a:solidFill>
-            </a:endParaRPr>
-          </a:p>
-          <a:p>
-            <a:r>
-              <a:rPr lang="en-US" b="0" dirty="0">
-                <a:solidFill>
-                  <a:schemeClr val="tx1"/>
-                </a:solidFill>
-              </a:rPr>
-              <a:t>You cannot simply switch a lab, but you can ask them via email, if something happened and you missed a lab or so.</a:t>
-            </a:r>
+              <a:t>This week's lab:</a:t>
+            </a:r>
+          </a:p>
+          <a:p>
+            <a:endParaRPr lang="en-US" b="0" dirty="0"/>
           </a:p>
         </p:txBody>
       </p:sp>
+      <p:pic>
+        <p:nvPicPr>
+          <p:cNvPr id="5" name="Picture 4">
+            <a:extLst>
+              <a:ext uri="{FF2B5EF4-FFF2-40B4-BE49-F238E27FC236}">
+                <a16:creationId xmlns:a16="http://schemas.microsoft.com/office/drawing/2014/main" id="{82386557-5BB9-601D-A7C0-2D34023835DA}"/>
+              </a:ext>
+            </a:extLst>
+          </p:cNvPr>
+          <p:cNvPicPr>
+            <a:picLocks noChangeAspect="1"/>
+          </p:cNvPicPr>
+          <p:nvPr/>
+        </p:nvPicPr>
+        <p:blipFill>
+          <a:blip r:embed="rId2"/>
+          <a:stretch>
+            <a:fillRect/>
+          </a:stretch>
+        </p:blipFill>
+        <p:spPr>
+          <a:xfrm>
+            <a:off x="4065284" y="800451"/>
+            <a:ext cx="4469118" cy="5812907"/>
+          </a:xfrm>
+          <a:prstGeom prst="rect">
+            <a:avLst/>
+          </a:prstGeom>
+        </p:spPr>
+      </p:pic>
     </p:spTree>
     <p:extLst>
       <p:ext uri="{BB962C8B-B14F-4D97-AF65-F5344CB8AC3E}">
-        <p14:creationId xmlns:p14="http://schemas.microsoft.com/office/powerpoint/2010/main" val="602304598"/>
+        <p14:creationId xmlns:p14="http://schemas.microsoft.com/office/powerpoint/2010/main" val="694747665"/>
       </p:ext>
     </p:extLst>
   </p:cSld>
@@ -10635,108 +10506,6 @@
         </p:nvSpPr>
         <p:spPr>
           <a:xfrm>
-            <a:off x="1326116" y="1304422"/>
-            <a:ext cx="9144000" cy="5308936"/>
-          </a:xfrm>
-        </p:spPr>
-        <p:txBody>
-          <a:bodyPr>
-            <a:normAutofit/>
-          </a:bodyPr>
-          <a:lstStyle/>
-          <a:p>
-            <a:r>
-              <a:rPr lang="en-US" dirty="0">
-                <a:solidFill>
-                  <a:schemeClr val="tx1"/>
-                </a:solidFill>
-              </a:rPr>
-              <a:t>This week's lab:</a:t>
-            </a:r>
-          </a:p>
-          <a:p>
-            <a:endParaRPr lang="en-US" b="0" dirty="0"/>
-          </a:p>
-        </p:txBody>
-      </p:sp>
-      <p:pic>
-        <p:nvPicPr>
-          <p:cNvPr id="5" name="Picture 4">
-            <a:extLst>
-              <a:ext uri="{FF2B5EF4-FFF2-40B4-BE49-F238E27FC236}">
-                <a16:creationId xmlns:a16="http://schemas.microsoft.com/office/drawing/2014/main" id="{82386557-5BB9-601D-A7C0-2D34023835DA}"/>
-              </a:ext>
-            </a:extLst>
-          </p:cNvPr>
-          <p:cNvPicPr>
-            <a:picLocks noChangeAspect="1"/>
-          </p:cNvPicPr>
-          <p:nvPr/>
-        </p:nvPicPr>
-        <p:blipFill>
-          <a:blip r:embed="rId2"/>
-          <a:stretch>
-            <a:fillRect/>
-          </a:stretch>
-        </p:blipFill>
-        <p:spPr>
-          <a:xfrm>
-            <a:off x="4065284" y="800451"/>
-            <a:ext cx="4469118" cy="5812907"/>
-          </a:xfrm>
-          <a:prstGeom prst="rect">
-            <a:avLst/>
-          </a:prstGeom>
-        </p:spPr>
-      </p:pic>
-    </p:spTree>
-    <p:extLst>
-      <p:ext uri="{BB962C8B-B14F-4D97-AF65-F5344CB8AC3E}">
-        <p14:creationId xmlns:p14="http://schemas.microsoft.com/office/powerpoint/2010/main" val="694747665"/>
-      </p:ext>
-    </p:extLst>
-  </p:cSld>
-  <p:clrMapOvr>
-    <a:masterClrMapping/>
-  </p:clrMapOvr>
-</p:sld>
-</file>
-
-<file path=ppt/slides/slide17.xml><?xml version="1.0" encoding="utf-8"?>
-<p:sld xmlns:a="http://schemas.openxmlformats.org/drawingml/2006/main" xmlns:r="http://schemas.openxmlformats.org/officeDocument/2006/relationships" xmlns:p="http://schemas.openxmlformats.org/presentationml/2006/main">
-  <p:cSld>
-    <p:spTree>
-      <p:nvGrpSpPr>
-        <p:cNvPr id="1" name=""/>
-        <p:cNvGrpSpPr/>
-        <p:nvPr/>
-      </p:nvGrpSpPr>
-      <p:grpSpPr>
-        <a:xfrm>
-          <a:off x="0" y="0"/>
-          <a:ext cx="0" cy="0"/>
-          <a:chOff x="0" y="0"/>
-          <a:chExt cx="0" cy="0"/>
-        </a:xfrm>
-      </p:grpSpPr>
-      <p:sp>
-        <p:nvSpPr>
-          <p:cNvPr id="2" name="Subtitle 1">
-            <a:extLst>
-              <a:ext uri="{FF2B5EF4-FFF2-40B4-BE49-F238E27FC236}">
-                <a16:creationId xmlns:a16="http://schemas.microsoft.com/office/drawing/2014/main" id="{DAF3DE3F-7502-904F-9BAB-B1F5DEA23BEF}"/>
-              </a:ext>
-            </a:extLst>
-          </p:cNvPr>
-          <p:cNvSpPr>
-            <a:spLocks noGrp="1"/>
-          </p:cNvSpPr>
-          <p:nvPr>
-            <p:ph type="subTitle" idx="1"/>
-          </p:nvPr>
-        </p:nvSpPr>
-        <p:spPr>
-          <a:xfrm>
             <a:off x="933049" y="754909"/>
             <a:ext cx="10400698" cy="5870480"/>
           </a:xfrm>
@@ -10781,7 +10550,7 @@
                   <a:schemeClr val="tx1"/>
                 </a:solidFill>
               </a:rPr>
-              <a:t>Major</a:t>
+              <a:t>Name?</a:t>
             </a:r>
           </a:p>
           <a:p>
@@ -10801,12 +10570,38 @@
               <a:buChar char="•"/>
             </a:pPr>
             <a:r>
+              <a:rPr lang="en-US" b="0">
+                <a:solidFill>
+                  <a:schemeClr val="tx1"/>
+                </a:solidFill>
+              </a:rPr>
+              <a:t>Major?</a:t>
+            </a:r>
+            <a:endParaRPr lang="en-US" b="0" dirty="0">
+              <a:solidFill>
+                <a:schemeClr val="tx1"/>
+              </a:solidFill>
+            </a:endParaRPr>
+          </a:p>
+          <a:p>
+            <a:endParaRPr lang="en-US" b="0" dirty="0">
+              <a:solidFill>
+                <a:schemeClr val="tx1"/>
+              </a:solidFill>
+            </a:endParaRPr>
+          </a:p>
+          <a:p>
+            <a:pPr marL="342900" indent="-342900">
+              <a:buFont typeface="Arial" panose="020B0604020202020204" pitchFamily="34" charset="0"/>
+              <a:buChar char="•"/>
+            </a:pPr>
+            <a:r>
               <a:rPr lang="en-US" b="0" dirty="0">
                 <a:solidFill>
                   <a:schemeClr val="tx1"/>
                 </a:solidFill>
               </a:rPr>
-              <a:t>Most liked programming language?</a:t>
+              <a:t>Experience in assembler?</a:t>
             </a:r>
           </a:p>
           <a:p>
@@ -10831,7 +10626,7 @@
                   <a:schemeClr val="tx1"/>
                 </a:solidFill>
               </a:rPr>
-              <a:t>Most dislike programming language? And why?</a:t>
+              <a:t>How do you use AI?</a:t>
             </a:r>
           </a:p>
           <a:p>
@@ -10856,8 +10651,41 @@
                   <a:schemeClr val="tx1"/>
                 </a:solidFill>
               </a:rPr>
-              <a:t>Experience in assembler?</a:t>
-            </a:r>
+              <a:t>How your friends use AI?</a:t>
+            </a:r>
+          </a:p>
+          <a:p>
+            <a:pPr marL="342900" indent="-342900">
+              <a:buFont typeface="Arial" panose="020B0604020202020204" pitchFamily="34" charset="0"/>
+              <a:buChar char="•"/>
+            </a:pPr>
+            <a:endParaRPr lang="en-US" b="0" dirty="0">
+              <a:solidFill>
+                <a:schemeClr val="tx1"/>
+              </a:solidFill>
+            </a:endParaRPr>
+          </a:p>
+          <a:p>
+            <a:pPr marL="342900" indent="-342900">
+              <a:buFont typeface="Arial" panose="020B0604020202020204" pitchFamily="34" charset="0"/>
+              <a:buChar char="•"/>
+            </a:pPr>
+            <a:endParaRPr lang="en-US" b="0" dirty="0">
+              <a:solidFill>
+                <a:schemeClr val="tx1"/>
+              </a:solidFill>
+            </a:endParaRPr>
+          </a:p>
+          <a:p>
+            <a:pPr marL="342900" indent="-342900">
+              <a:buFont typeface="Arial" panose="020B0604020202020204" pitchFamily="34" charset="0"/>
+              <a:buChar char="•"/>
+            </a:pPr>
+            <a:endParaRPr lang="en-US" b="0" dirty="0">
+              <a:solidFill>
+                <a:schemeClr val="tx1"/>
+              </a:solidFill>
+            </a:endParaRPr>
           </a:p>
         </p:txBody>
       </p:sp>
@@ -10874,7 +10702,7 @@
 </p:sld>
 </file>
 
-<file path=ppt/slides/slide18.xml><?xml version="1.0" encoding="utf-8"?>
+<file path=ppt/slides/slide17.xml><?xml version="1.0" encoding="utf-8"?>
 <p:sld xmlns:a="http://schemas.openxmlformats.org/drawingml/2006/main" xmlns:r="http://schemas.openxmlformats.org/officeDocument/2006/relationships" xmlns:p="http://schemas.openxmlformats.org/presentationml/2006/main">
   <p:cSld>
     <p:spTree>
@@ -11819,7 +11647,7 @@
         </p:spPr>
         <p:txBody>
           <a:bodyPr>
-            <a:normAutofit/>
+            <a:normAutofit fontScale="92500" lnSpcReduction="10000"/>
           </a:bodyPr>
           <a:lstStyle/>
           <a:p>
@@ -11880,6 +11708,31 @@
                 </a:solidFill>
               </a:rPr>
               <a:t>10 multiple choice questions</a:t>
+            </a:r>
+          </a:p>
+          <a:p>
+            <a:pPr marL="342900" indent="-342900">
+              <a:buFont typeface="Arial" panose="020B0604020202020204" pitchFamily="34" charset="0"/>
+              <a:buChar char="•"/>
+            </a:pPr>
+            <a:endParaRPr lang="en-US" b="0" dirty="0">
+              <a:solidFill>
+                <a:schemeClr val="tx1"/>
+              </a:solidFill>
+            </a:endParaRPr>
+          </a:p>
+          <a:p>
+            <a:pPr marL="342900" indent="-342900">
+              <a:buFont typeface="Arial" panose="020B0604020202020204" pitchFamily="34" charset="0"/>
+              <a:buChar char="•"/>
+            </a:pPr>
+            <a:r>
+              <a:rPr lang="en-US" b="0" dirty="0">
+                <a:solidFill>
+                  <a:schemeClr val="tx1"/>
+                </a:solidFill>
+              </a:rPr>
+              <a:t>1 short implementation question</a:t>
             </a:r>
             <a:br>
               <a:rPr lang="en-US" b="0" dirty="0">
@@ -11905,7 +11758,7 @@
                   <a:schemeClr val="tx1"/>
                 </a:solidFill>
               </a:rPr>
-              <a:t>20 minutes (last 20 minutes of the lecture)</a:t>
+              <a:t>20 minutes + 10 minutes for OAE students (last 30 minutes of the lecture)</a:t>
             </a:r>
           </a:p>
           <a:p>
@@ -11930,7 +11783,7 @@
                   <a:schemeClr val="tx1"/>
                 </a:solidFill>
               </a:rPr>
-              <a:t>Worst quiz will be dropped</a:t>
+              <a:t>Worst quiz will be dropped (Automatically by Camino)</a:t>
             </a:r>
           </a:p>
           <a:p>
@@ -12262,7 +12115,7 @@
                   <a:schemeClr val="tx1"/>
                 </a:solidFill>
               </a:rPr>
-              <a:t>One cheat-sheet</a:t>
+              <a:t>Two cheat-sheet</a:t>
             </a:r>
           </a:p>
           <a:p>
@@ -12287,7 +12140,7 @@
                   <a:schemeClr val="tx1"/>
                 </a:solidFill>
               </a:rPr>
-              <a:t>20 multiple choice questions</a:t>
+              <a:t>30 multiple choice questions</a:t>
             </a:r>
           </a:p>
           <a:p>
@@ -12312,7 +12165,7 @@
                   <a:schemeClr val="tx1"/>
                 </a:solidFill>
               </a:rPr>
-              <a:t>5 Programmer/calculation questions</a:t>
+              <a:t>4 Programmer/calculation questions</a:t>
             </a:r>
           </a:p>
         </p:txBody>

--- a/Week01_IntroAndBinaryNumbers/Ch00_Basics_V4.pptx
+++ b/Week01_IntroAndBinaryNumbers/Ch00_Basics_V4.pptx
@@ -218,7 +218,7 @@
           <a:p>
             <a:fld id="{8E938536-29D3-49BD-A567-41CAF057586A}" type="datetimeFigureOut">
               <a:rPr lang="en-US" smtClean="0"/>
-              <a:t>9/20/2026</a:t>
+              <a:t>9/21/2026</a:t>
             </a:fld>
             <a:endParaRPr lang="en-US"/>
           </a:p>
@@ -383,7 +383,7 @@
           <a:p>
             <a:fld id="{71559A16-B3AD-4CE2-9A5E-FAAD3C2C27CA}" type="datetimeFigureOut">
               <a:rPr lang="en-US" smtClean="0"/>
-              <a:t>9/20/2026</a:t>
+              <a:t>9/21/2026</a:t>
             </a:fld>
             <a:endParaRPr lang="en-US"/>
           </a:p>
@@ -10161,7 +10161,7 @@
         </p:spPr>
         <p:txBody>
           <a:bodyPr>
-            <a:normAutofit fontScale="92500" lnSpcReduction="10000"/>
+            <a:normAutofit fontScale="77500" lnSpcReduction="20000"/>
           </a:bodyPr>
           <a:lstStyle/>
           <a:p>
@@ -10191,21 +10191,60 @@
               <a:buChar char="•"/>
             </a:pPr>
             <a:r>
-              <a:rPr lang="en-US" b="0" dirty="0" err="1">
-                <a:solidFill>
-                  <a:schemeClr val="tx1"/>
-                </a:solidFill>
-              </a:rPr>
-              <a:t>Haefey</a:t>
-            </a:r>
-            <a:r>
               <a:rPr lang="en-US" b="0" dirty="0">
                 <a:solidFill>
                   <a:schemeClr val="tx1"/>
                 </a:solidFill>
               </a:rPr>
-              <a:t> Hall 111</a:t>
-            </a:r>
+              <a:t>Tuesday 2:15pm Dhanishtha</a:t>
+            </a:r>
+          </a:p>
+          <a:p>
+            <a:pPr marL="342900" indent="-342900">
+              <a:buFont typeface="Arial" panose="020B0604020202020204" pitchFamily="34" charset="0"/>
+              <a:buChar char="•"/>
+            </a:pPr>
+            <a:r>
+              <a:rPr lang="en-US" b="0" dirty="0">
+                <a:solidFill>
+                  <a:schemeClr val="tx1"/>
+                </a:solidFill>
+              </a:rPr>
+              <a:t>Wednesday 2:15pm Vedica</a:t>
+            </a:r>
+          </a:p>
+          <a:p>
+            <a:pPr marL="342900" indent="-342900">
+              <a:buFont typeface="Arial" panose="020B0604020202020204" pitchFamily="34" charset="0"/>
+              <a:buChar char="•"/>
+            </a:pPr>
+            <a:r>
+              <a:rPr lang="en-US" b="0" dirty="0">
+                <a:solidFill>
+                  <a:schemeClr val="tx1"/>
+                </a:solidFill>
+              </a:rPr>
+              <a:t>Thursday 2:15pm Vedica</a:t>
+            </a:r>
+          </a:p>
+          <a:p>
+            <a:pPr marL="342900" indent="-342900">
+              <a:buFont typeface="Arial" panose="020B0604020202020204" pitchFamily="34" charset="0"/>
+              <a:buChar char="•"/>
+            </a:pPr>
+            <a:r>
+              <a:rPr lang="en-US" b="0">
+                <a:solidFill>
+                  <a:schemeClr val="tx1"/>
+                </a:solidFill>
+              </a:rPr>
+              <a:t>Friday 2:15pm Sahana</a:t>
+            </a:r>
+            <a:endParaRPr lang="en-US" b="0" dirty="0">
+              <a:solidFill>
+                <a:schemeClr val="tx1"/>
+              </a:solidFill>
+            </a:endParaRPr>
           </a:p>
           <a:p>
             <a:pPr marL="342900" indent="-342900">
